--- a/dataset/guides_final/HW/manual/IT-HW-002-M_업무 장비 교체·수리 처리 매뉴얼.pptx
+++ b/dataset/guides_final/HW/manual/IT-HW-002-M_업무 장비 교체·수리 처리 매뉴얼.pptx
@@ -38590,7 +38590,7 @@
                 <a:ea typeface="Malgun Gothic"/>
                 <a:cs typeface="Malgun Gothic"/>
               </a:rPr>
-              <a:t>티켓: 담당자 조치가 필요한 건. 담당팀에 배정하고 상태를 RDY → IP → FIN → CLS 으로 관리한다.</a:t>
+              <a:t>티켓: 담당자 조치가 필요한 건. 담당팀에 배정하고 상태를 RDY → WIP → FIN → CLS 으로 관리한다.</a:t>
             </a:r>
           </a:p>
         </p:txBody>

--- a/dataset/guides_final/HW/manual/IT-HW-002-M_업무 장비 교체·수리 처리 매뉴얼.pptx
+++ b/dataset/guides_final/HW/manual/IT-HW-002-M_업무 장비 교체·수리 처리 매뉴얼.pptx
@@ -3249,7 +3249,7 @@
                 <a:ea typeface="Malgun Gothic"/>
                 <a:cs typeface="Malgun Gothic"/>
               </a:rPr>
-              <a:t>한화시스템 ICT IT 담당자 매뉴얼 · HW·업무 PC</a:t>
+              <a:t>가상 ICT 기업 IT 담당자 매뉴얼 · HW·업무 PC</a:t>
             </a:r>
           </a:p>
         </p:txBody>
@@ -3528,7 +3528,7 @@
                 <a:ea typeface="Malgun Gothic"/>
                 <a:cs typeface="Malgun Gothic"/>
               </a:rPr>
-              <a:t>© HANWHA SYSTEMS ICT · IT-HW-002-M · 사내 제한</a:t>
+              <a:t>© 가상 ICT 기업 · IT-HW-002-M · 사내 제한</a:t>
             </a:r>
           </a:p>
         </p:txBody>
@@ -5085,7 +5085,7 @@
                 <a:ea typeface="Malgun Gothic"/>
                 <a:cs typeface="Malgun Gothic"/>
               </a:rPr>
-              <a:t>© HANWHA SYSTEMS ICT · IT-HW-002-M · 사내 제한</a:t>
+              <a:t>© 가상 ICT 기업 · IT-HW-002-M · 사내 제한</a:t>
             </a:r>
           </a:p>
         </p:txBody>
@@ -6002,7 +6002,7 @@
                 <a:ea typeface="Malgun Gothic"/>
                 <a:cs typeface="Malgun Gothic"/>
               </a:rPr>
-              <a:t>© HANWHA SYSTEMS ICT · IT-HW-002-M · 사내 제한</a:t>
+              <a:t>© 가상 ICT 기업 · IT-HW-002-M · 사내 제한</a:t>
             </a:r>
           </a:p>
         </p:txBody>
@@ -7128,7 +7128,7 @@
                 <a:ea typeface="Malgun Gothic"/>
                 <a:cs typeface="Malgun Gothic"/>
               </a:rPr>
-              <a:t>© HANWHA SYSTEMS ICT · IT-HW-002-M · 사내 제한</a:t>
+              <a:t>© 가상 ICT 기업 · IT-HW-002-M · 사내 제한</a:t>
             </a:r>
           </a:p>
         </p:txBody>
@@ -8591,7 +8591,7 @@
                 <a:ea typeface="Malgun Gothic"/>
                 <a:cs typeface="Malgun Gothic"/>
               </a:rPr>
-              <a:t>© HANWHA SYSTEMS ICT · IT-HW-002-M · 사내 제한</a:t>
+              <a:t>© 가상 ICT 기업 · IT-HW-002-M · 사내 제한</a:t>
             </a:r>
           </a:p>
         </p:txBody>
@@ -9508,7 +9508,7 @@
                 <a:ea typeface="Malgun Gothic"/>
                 <a:cs typeface="Malgun Gothic"/>
               </a:rPr>
-              <a:t>© HANWHA SYSTEMS ICT · IT-HW-002-M · 사내 제한</a:t>
+              <a:t>© 가상 ICT 기업 · IT-HW-002-M · 사내 제한</a:t>
             </a:r>
           </a:p>
         </p:txBody>
@@ -10634,7 +10634,7 @@
                 <a:ea typeface="Malgun Gothic"/>
                 <a:cs typeface="Malgun Gothic"/>
               </a:rPr>
-              <a:t>© HANWHA SYSTEMS ICT · IT-HW-002-M · 사내 제한</a:t>
+              <a:t>© 가상 ICT 기업 · IT-HW-002-M · 사내 제한</a:t>
             </a:r>
           </a:p>
         </p:txBody>
@@ -12003,7 +12003,7 @@
                 <a:ea typeface="Malgun Gothic"/>
                 <a:cs typeface="Malgun Gothic"/>
               </a:rPr>
-              <a:t>© HANWHA SYSTEMS ICT · IT-HW-002-M · 사내 제한</a:t>
+              <a:t>© 가상 ICT 기업 · IT-HW-002-M · 사내 제한</a:t>
             </a:r>
           </a:p>
         </p:txBody>
@@ -12920,7 +12920,7 @@
                 <a:ea typeface="Malgun Gothic"/>
                 <a:cs typeface="Malgun Gothic"/>
               </a:rPr>
-              <a:t>© HANWHA SYSTEMS ICT · IT-HW-002-M · 사내 제한</a:t>
+              <a:t>© 가상 ICT 기업 · IT-HW-002-M · 사내 제한</a:t>
             </a:r>
           </a:p>
         </p:txBody>
@@ -14046,7 +14046,7 @@
                 <a:ea typeface="Malgun Gothic"/>
                 <a:cs typeface="Malgun Gothic"/>
               </a:rPr>
-              <a:t>© HANWHA SYSTEMS ICT · IT-HW-002-M · 사내 제한</a:t>
+              <a:t>© 가상 ICT 기업 · IT-HW-002-M · 사내 제한</a:t>
             </a:r>
           </a:p>
         </p:txBody>
@@ -15415,7 +15415,7 @@
                 <a:ea typeface="Malgun Gothic"/>
                 <a:cs typeface="Malgun Gothic"/>
               </a:rPr>
-              <a:t>© HANWHA SYSTEMS ICT · IT-HW-002-M · 사내 제한</a:t>
+              <a:t>© 가상 ICT 기업 · IT-HW-002-M · 사내 제한</a:t>
             </a:r>
           </a:p>
         </p:txBody>
@@ -17058,7 +17058,7 @@
                 <a:ea typeface="Malgun Gothic"/>
                 <a:cs typeface="Malgun Gothic"/>
               </a:rPr>
-              <a:t>© HANWHA SYSTEMS ICT · IT-HW-002-M · 사내 제한</a:t>
+              <a:t>© 가상 ICT 기업 · IT-HW-002-M · 사내 제한</a:t>
             </a:r>
           </a:p>
         </p:txBody>
@@ -17975,7 +17975,7 @@
                 <a:ea typeface="Malgun Gothic"/>
                 <a:cs typeface="Malgun Gothic"/>
               </a:rPr>
-              <a:t>© HANWHA SYSTEMS ICT · IT-HW-002-M · 사내 제한</a:t>
+              <a:t>© 가상 ICT 기업 · IT-HW-002-M · 사내 제한</a:t>
             </a:r>
           </a:p>
         </p:txBody>
@@ -19101,7 +19101,7 @@
                 <a:ea typeface="Malgun Gothic"/>
                 <a:cs typeface="Malgun Gothic"/>
               </a:rPr>
-              <a:t>© HANWHA SYSTEMS ICT · IT-HW-002-M · 사내 제한</a:t>
+              <a:t>© 가상 ICT 기업 · IT-HW-002-M · 사내 제한</a:t>
             </a:r>
           </a:p>
         </p:txBody>
@@ -20564,7 +20564,7 @@
                 <a:ea typeface="Malgun Gothic"/>
                 <a:cs typeface="Malgun Gothic"/>
               </a:rPr>
-              <a:t>© HANWHA SYSTEMS ICT · IT-HW-002-M · 사내 제한</a:t>
+              <a:t>© 가상 ICT 기업 · IT-HW-002-M · 사내 제한</a:t>
             </a:r>
           </a:p>
         </p:txBody>
@@ -21669,7 +21669,7 @@
                 <a:ea typeface="Malgun Gothic"/>
                 <a:cs typeface="Malgun Gothic"/>
               </a:rPr>
-              <a:t>© HANWHA SYSTEMS ICT · IT-HW-002-M · 사내 제한</a:t>
+              <a:t>© 가상 ICT 기업 · IT-HW-002-M · 사내 제한</a:t>
             </a:r>
           </a:p>
         </p:txBody>
@@ -22795,7 +22795,7 @@
                 <a:ea typeface="Malgun Gothic"/>
                 <a:cs typeface="Malgun Gothic"/>
               </a:rPr>
-              <a:t>© HANWHA SYSTEMS ICT · IT-HW-002-M · 사내 제한</a:t>
+              <a:t>© 가상 ICT 기업 · IT-HW-002-M · 사내 제한</a:t>
             </a:r>
           </a:p>
         </p:txBody>
@@ -23976,7 +23976,7 @@
                 <a:ea typeface="Malgun Gothic"/>
                 <a:cs typeface="Malgun Gothic"/>
               </a:rPr>
-              <a:t>© HANWHA SYSTEMS ICT · IT-HW-002-M · 사내 제한</a:t>
+              <a:t>© 가상 ICT 기업 · IT-HW-002-M · 사내 제한</a:t>
             </a:r>
           </a:p>
         </p:txBody>
@@ -24987,7 +24987,7 @@
                 <a:ea typeface="Malgun Gothic"/>
                 <a:cs typeface="Malgun Gothic"/>
               </a:rPr>
-              <a:t>© HANWHA SYSTEMS ICT · IT-HW-002-M · 사내 제한</a:t>
+              <a:t>© 가상 ICT 기업 · IT-HW-002-M · 사내 제한</a:t>
             </a:r>
           </a:p>
         </p:txBody>
@@ -26113,7 +26113,7 @@
                 <a:ea typeface="Malgun Gothic"/>
                 <a:cs typeface="Malgun Gothic"/>
               </a:rPr>
-              <a:t>© HANWHA SYSTEMS ICT · IT-HW-002-M · 사내 제한</a:t>
+              <a:t>© 가상 ICT 기업 · IT-HW-002-M · 사내 제한</a:t>
             </a:r>
           </a:p>
         </p:txBody>
@@ -27388,7 +27388,7 @@
                 <a:ea typeface="Malgun Gothic"/>
                 <a:cs typeface="Malgun Gothic"/>
               </a:rPr>
-              <a:t>© HANWHA SYSTEMS ICT · IT-HW-002-M · 사내 제한</a:t>
+              <a:t>© 가상 ICT 기업 · IT-HW-002-M · 사내 제한</a:t>
             </a:r>
           </a:p>
         </p:txBody>
@@ -28305,7 +28305,7 @@
                 <a:ea typeface="Malgun Gothic"/>
                 <a:cs typeface="Malgun Gothic"/>
               </a:rPr>
-              <a:t>© HANWHA SYSTEMS ICT · IT-HW-002-M · 사내 제한</a:t>
+              <a:t>© 가상 ICT 기업 · IT-HW-002-M · 사내 제한</a:t>
             </a:r>
           </a:p>
         </p:txBody>
@@ -29451,7 +29451,7 @@
                 <a:ea typeface="Malgun Gothic"/>
                 <a:cs typeface="Malgun Gothic"/>
               </a:rPr>
-              <a:t>© HANWHA SYSTEMS ICT · IT-HW-002-M · 사내 제한</a:t>
+              <a:t>© 가상 ICT 기업 · IT-HW-002-M · 사내 제한</a:t>
             </a:r>
           </a:p>
         </p:txBody>
@@ -29699,7 +29699,7 @@
                 <a:ea typeface="Malgun Gothic"/>
                 <a:cs typeface="Malgun Gothic"/>
               </a:rPr>
-              <a:t>© HANWHA SYSTEMS ICT · IT-HW-002-M · 사내 제한</a:t>
+              <a:t>© 가상 ICT 기업 · IT-HW-002-M · 사내 제한</a:t>
             </a:r>
           </a:p>
         </p:txBody>
@@ -30358,7 +30358,7 @@
                 <a:ea typeface="Malgun Gothic"/>
                 <a:cs typeface="Malgun Gothic"/>
               </a:rPr>
-              <a:t>© HANWHA SYSTEMS ICT · IT-HW-002-M · 사내 제한</a:t>
+              <a:t>© 가상 ICT 기업 · IT-HW-002-M · 사내 제한</a:t>
             </a:r>
           </a:p>
         </p:txBody>
@@ -30606,7 +30606,7 @@
                 <a:ea typeface="Malgun Gothic"/>
                 <a:cs typeface="Malgun Gothic"/>
               </a:rPr>
-              <a:t>© HANWHA SYSTEMS ICT · IT-HW-002-M · 사내 제한</a:t>
+              <a:t>© 가상 ICT 기업 · IT-HW-002-M · 사내 제한</a:t>
             </a:r>
           </a:p>
         </p:txBody>
@@ -31634,7 +31634,7 @@
                 <a:ea typeface="Malgun Gothic"/>
                 <a:cs typeface="Malgun Gothic"/>
               </a:rPr>
-              <a:t>© HANWHA SYSTEMS ICT · IT-HW-002-M · 사내 제한</a:t>
+              <a:t>© 가상 ICT 기업 · IT-HW-002-M · 사내 제한</a:t>
             </a:r>
           </a:p>
         </p:txBody>
@@ -31882,7 +31882,7 @@
                 <a:ea typeface="Malgun Gothic"/>
                 <a:cs typeface="Malgun Gothic"/>
               </a:rPr>
-              <a:t>© HANWHA SYSTEMS ICT · IT-HW-002-M · 사내 제한</a:t>
+              <a:t>© 가상 ICT 기업 · IT-HW-002-M · 사내 제한</a:t>
             </a:r>
           </a:p>
         </p:txBody>
@@ -32574,7 +32574,7 @@
                 <a:ea typeface="Malgun Gothic"/>
                 <a:cs typeface="Malgun Gothic"/>
               </a:rPr>
-              <a:t>© HANWHA SYSTEMS ICT · IT-HW-002-M · 사내 제한</a:t>
+              <a:t>© 가상 ICT 기업 · IT-HW-002-M · 사내 제한</a:t>
             </a:r>
           </a:p>
         </p:txBody>
@@ -33551,7 +33551,7 @@
                 <a:ea typeface="Malgun Gothic"/>
                 <a:cs typeface="Malgun Gothic"/>
               </a:rPr>
-              <a:t>© HANWHA SYSTEMS ICT · IT-HW-002-M · 사내 제한</a:t>
+              <a:t>© 가상 ICT 기업 · IT-HW-002-M · 사내 제한</a:t>
             </a:r>
           </a:p>
         </p:txBody>
@@ -33799,7 +33799,7 @@
                 <a:ea typeface="Malgun Gothic"/>
                 <a:cs typeface="Malgun Gothic"/>
               </a:rPr>
-              <a:t>© HANWHA SYSTEMS ICT · IT-HW-002-M · 사내 제한</a:t>
+              <a:t>© 가상 ICT 기업 · IT-HW-002-M · 사내 제한</a:t>
             </a:r>
           </a:p>
         </p:txBody>
@@ -34697,7 +34697,7 @@
                 <a:ea typeface="Malgun Gothic"/>
                 <a:cs typeface="Malgun Gothic"/>
               </a:rPr>
-              <a:t>© HANWHA SYSTEMS ICT · IT-HW-002-M · 사내 제한</a:t>
+              <a:t>© 가상 ICT 기업 · IT-HW-002-M · 사내 제한</a:t>
             </a:r>
           </a:p>
         </p:txBody>
@@ -34945,7 +34945,7 @@
                 <a:ea typeface="Malgun Gothic"/>
                 <a:cs typeface="Malgun Gothic"/>
               </a:rPr>
-              <a:t>© HANWHA SYSTEMS ICT · IT-HW-002-M · 사내 제한</a:t>
+              <a:t>© 가상 ICT 기업 · IT-HW-002-M · 사내 제한</a:t>
             </a:r>
           </a:p>
         </p:txBody>
@@ -38872,7 +38872,7 @@
                 <a:ea typeface="Malgun Gothic"/>
                 <a:cs typeface="Malgun Gothic"/>
               </a:rPr>
-              <a:t>© HANWHA SYSTEMS ICT · IT-HW-002-M · 사내 제한</a:t>
+              <a:t>© 가상 ICT 기업 · IT-HW-002-M · 사내 제한</a:t>
             </a:r>
           </a:p>
         </p:txBody>
@@ -39120,7 +39120,7 @@
                 <a:ea typeface="Malgun Gothic"/>
                 <a:cs typeface="Malgun Gothic"/>
               </a:rPr>
-              <a:t>© HANWHA SYSTEMS ICT · IT-HW-002-M · 사내 제한</a:t>
+              <a:t>© 가상 ICT 기업 · IT-HW-002-M · 사내 제한</a:t>
             </a:r>
           </a:p>
         </p:txBody>
@@ -40246,7 +40246,7 @@
                 <a:ea typeface="Malgun Gothic"/>
                 <a:cs typeface="Malgun Gothic"/>
               </a:rPr>
-              <a:t>© HANWHA SYSTEMS ICT · IT-HW-002-M · 사내 제한</a:t>
+              <a:t>© 가상 ICT 기업 · IT-HW-002-M · 사내 제한</a:t>
             </a:r>
           </a:p>
         </p:txBody>
